--- a/Project/ICL/ICL_Latent_Space_Manipulation_Research.pptx
+++ b/Project/ICL/ICL_Latent_Space_Manipulation_Research.pptx
@@ -5,23 +5,23 @@
     <p:sldMasterId id="2147483648" r:id="rId1"/>
   </p:sldMasterIdLst>
   <p:sldIdLst>
-    <p:sldId id="256" r:id="rId7"/>
-    <p:sldId id="257" r:id="rId8"/>
-    <p:sldId id="258" r:id="rId9"/>
-    <p:sldId id="259" r:id="rId10"/>
-    <p:sldId id="260" r:id="rId11"/>
-    <p:sldId id="261" r:id="rId12"/>
-    <p:sldId id="262" r:id="rId13"/>
-    <p:sldId id="263" r:id="rId14"/>
-    <p:sldId id="264" r:id="rId15"/>
-    <p:sldId id="265" r:id="rId16"/>
-    <p:sldId id="266" r:id="rId17"/>
-    <p:sldId id="267" r:id="rId18"/>
-    <p:sldId id="268" r:id="rId19"/>
-    <p:sldId id="269" r:id="rId20"/>
-    <p:sldId id="270" r:id="rId21"/>
+    <p:sldId id="256" r:id="rId2"/>
+    <p:sldId id="257" r:id="rId3"/>
+    <p:sldId id="258" r:id="rId4"/>
+    <p:sldId id="259" r:id="rId5"/>
+    <p:sldId id="260" r:id="rId6"/>
+    <p:sldId id="261" r:id="rId7"/>
+    <p:sldId id="262" r:id="rId8"/>
+    <p:sldId id="263" r:id="rId9"/>
+    <p:sldId id="264" r:id="rId10"/>
+    <p:sldId id="265" r:id="rId11"/>
+    <p:sldId id="266" r:id="rId12"/>
+    <p:sldId id="267" r:id="rId13"/>
+    <p:sldId id="268" r:id="rId14"/>
+    <p:sldId id="269" r:id="rId15"/>
+    <p:sldId id="270" r:id="rId16"/>
   </p:sldIdLst>
-  <p:sldSz cx="12191695" cy="6858000" type="screen4x3"/>
+  <p:sldSz cx="12192000" cy="6858000"/>
   <p:notesSz cx="6858000" cy="9144000"/>
   <p:defaultTextStyle>
     <a:defPPr>
@@ -118,6 +118,22 @@
       </a:defRPr>
     </a:lvl9pPr>
   </p:defaultTextStyle>
+  <p:extLst>
+    <p:ext uri="{EFAFB233-063F-42B5-8137-9DF3F51BA10A}">
+      <p15:sldGuideLst xmlns:p15="http://schemas.microsoft.com/office/powerpoint/2012/main">
+        <p15:guide id="1" orient="horz" pos="2160">
+          <p15:clr>
+            <a:srgbClr val="A4A3A4"/>
+          </p15:clr>
+        </p15:guide>
+        <p15:guide id="2" pos="2880">
+          <p15:clr>
+            <a:srgbClr val="A4A3A4"/>
+          </p15:clr>
+        </p15:guide>
+      </p15:sldGuideLst>
+    </p:ext>
+  </p:extLst>
 </p:presentation>
 </file>
 
@@ -159,10 +175,9 @@
           <a:lstStyle/>
           <a:p>
             <a:r>
-              <a:rPr lang="en-US" smtClean="0"/>
+              <a:rPr lang="en-US"/>
               <a:t>Click to edit Master title style</a:t>
             </a:r>
-            <a:endParaRPr lang="en-US"/>
           </a:p>
         </p:txBody>
       </p:sp>
@@ -278,10 +293,9 @@
           </a:lstStyle>
           <a:p>
             <a:r>
-              <a:rPr lang="en-US" smtClean="0"/>
+              <a:rPr lang="en-US"/>
               <a:t>Click to edit Master subtitle style</a:t>
             </a:r>
-            <a:endParaRPr lang="en-US"/>
           </a:p>
         </p:txBody>
       </p:sp>
@@ -302,7 +316,7 @@
           <a:p>
             <a:fld id="{5BCAD085-E8A6-8845-BD4E-CB4CCA059FC4}" type="datetimeFigureOut">
               <a:rPr lang="en-US" smtClean="0"/>
-              <a:t>1/27/13</a:t>
+              <a:t>6/13/2026</a:t>
             </a:fld>
             <a:endParaRPr lang="en-US"/>
           </a:p>
@@ -396,10 +410,9 @@
           <a:lstStyle/>
           <a:p>
             <a:r>
-              <a:rPr lang="en-US" smtClean="0"/>
+              <a:rPr lang="en-US"/>
               <a:t>Click to edit Master title style</a:t>
             </a:r>
-            <a:endParaRPr lang="en-US"/>
           </a:p>
         </p:txBody>
       </p:sp>
@@ -420,38 +433,37 @@
           <a:p>
             <a:pPr lvl="0"/>
             <a:r>
-              <a:rPr lang="en-US" smtClean="0"/>
+              <a:rPr lang="en-US"/>
               <a:t>Click to edit Master text styles</a:t>
             </a:r>
           </a:p>
           <a:p>
             <a:pPr lvl="1"/>
             <a:r>
-              <a:rPr lang="en-US" smtClean="0"/>
+              <a:rPr lang="en-US"/>
               <a:t>Second level</a:t>
             </a:r>
           </a:p>
           <a:p>
             <a:pPr lvl="2"/>
             <a:r>
-              <a:rPr lang="en-US" smtClean="0"/>
+              <a:rPr lang="en-US"/>
               <a:t>Third level</a:t>
             </a:r>
           </a:p>
           <a:p>
             <a:pPr lvl="3"/>
             <a:r>
-              <a:rPr lang="en-US" smtClean="0"/>
+              <a:rPr lang="en-US"/>
               <a:t>Fourth level</a:t>
             </a:r>
           </a:p>
           <a:p>
             <a:pPr lvl="4"/>
             <a:r>
-              <a:rPr lang="en-US" smtClean="0"/>
+              <a:rPr lang="en-US"/>
               <a:t>Fifth level</a:t>
             </a:r>
-            <a:endParaRPr lang="en-US"/>
           </a:p>
         </p:txBody>
       </p:sp>
@@ -472,7 +484,7 @@
           <a:p>
             <a:fld id="{5BCAD085-E8A6-8845-BD4E-CB4CCA059FC4}" type="datetimeFigureOut">
               <a:rPr lang="en-US" smtClean="0"/>
-              <a:t>1/27/13</a:t>
+              <a:t>6/13/2026</a:t>
             </a:fld>
             <a:endParaRPr lang="en-US"/>
           </a:p>
@@ -571,10 +583,9 @@
           <a:lstStyle/>
           <a:p>
             <a:r>
-              <a:rPr lang="en-US" smtClean="0"/>
+              <a:rPr lang="en-US"/>
               <a:t>Click to edit Master title style</a:t>
             </a:r>
-            <a:endParaRPr lang="en-US"/>
           </a:p>
         </p:txBody>
       </p:sp>
@@ -600,38 +611,37 @@
           <a:p>
             <a:pPr lvl="0"/>
             <a:r>
-              <a:rPr lang="en-US" smtClean="0"/>
+              <a:rPr lang="en-US"/>
               <a:t>Click to edit Master text styles</a:t>
             </a:r>
           </a:p>
           <a:p>
             <a:pPr lvl="1"/>
             <a:r>
-              <a:rPr lang="en-US" smtClean="0"/>
+              <a:rPr lang="en-US"/>
               <a:t>Second level</a:t>
             </a:r>
           </a:p>
           <a:p>
             <a:pPr lvl="2"/>
             <a:r>
-              <a:rPr lang="en-US" smtClean="0"/>
+              <a:rPr lang="en-US"/>
               <a:t>Third level</a:t>
             </a:r>
           </a:p>
           <a:p>
             <a:pPr lvl="3"/>
             <a:r>
-              <a:rPr lang="en-US" smtClean="0"/>
+              <a:rPr lang="en-US"/>
               <a:t>Fourth level</a:t>
             </a:r>
           </a:p>
           <a:p>
             <a:pPr lvl="4"/>
             <a:r>
-              <a:rPr lang="en-US" smtClean="0"/>
+              <a:rPr lang="en-US"/>
               <a:t>Fifth level</a:t>
             </a:r>
-            <a:endParaRPr lang="en-US"/>
           </a:p>
         </p:txBody>
       </p:sp>
@@ -652,7 +662,7 @@
           <a:p>
             <a:fld id="{5BCAD085-E8A6-8845-BD4E-CB4CCA059FC4}" type="datetimeFigureOut">
               <a:rPr lang="en-US" smtClean="0"/>
-              <a:t>1/27/13</a:t>
+              <a:t>6/13/2026</a:t>
             </a:fld>
             <a:endParaRPr lang="en-US"/>
           </a:p>
@@ -746,10 +756,9 @@
           <a:lstStyle/>
           <a:p>
             <a:r>
-              <a:rPr lang="en-US" smtClean="0"/>
+              <a:rPr lang="en-US"/>
               <a:t>Click to edit Master title style</a:t>
             </a:r>
-            <a:endParaRPr lang="en-US"/>
           </a:p>
         </p:txBody>
       </p:sp>
@@ -770,38 +779,37 @@
           <a:p>
             <a:pPr lvl="0"/>
             <a:r>
-              <a:rPr lang="en-US" smtClean="0"/>
+              <a:rPr lang="en-US"/>
               <a:t>Click to edit Master text styles</a:t>
             </a:r>
           </a:p>
           <a:p>
             <a:pPr lvl="1"/>
             <a:r>
-              <a:rPr lang="en-US" smtClean="0"/>
+              <a:rPr lang="en-US"/>
               <a:t>Second level</a:t>
             </a:r>
           </a:p>
           <a:p>
             <a:pPr lvl="2"/>
             <a:r>
-              <a:rPr lang="en-US" smtClean="0"/>
+              <a:rPr lang="en-US"/>
               <a:t>Third level</a:t>
             </a:r>
           </a:p>
           <a:p>
             <a:pPr lvl="3"/>
             <a:r>
-              <a:rPr lang="en-US" smtClean="0"/>
+              <a:rPr lang="en-US"/>
               <a:t>Fourth level</a:t>
             </a:r>
           </a:p>
           <a:p>
             <a:pPr lvl="4"/>
             <a:r>
-              <a:rPr lang="en-US" smtClean="0"/>
+              <a:rPr lang="en-US"/>
               <a:t>Fifth level</a:t>
             </a:r>
-            <a:endParaRPr lang="en-US"/>
           </a:p>
         </p:txBody>
       </p:sp>
@@ -822,7 +830,7 @@
           <a:p>
             <a:fld id="{5BCAD085-E8A6-8845-BD4E-CB4CCA059FC4}" type="datetimeFigureOut">
               <a:rPr lang="en-US" smtClean="0"/>
-              <a:t>1/27/13</a:t>
+              <a:t>6/13/2026</a:t>
             </a:fld>
             <a:endParaRPr lang="en-US"/>
           </a:p>
@@ -925,10 +933,9 @@
           </a:lstStyle>
           <a:p>
             <a:r>
-              <a:rPr lang="en-US" smtClean="0"/>
+              <a:rPr lang="en-US"/>
               <a:t>Click to edit Master title style</a:t>
             </a:r>
-            <a:endParaRPr lang="en-US"/>
           </a:p>
         </p:txBody>
       </p:sp>
@@ -1045,7 +1052,7 @@
           <a:p>
             <a:pPr lvl="0"/>
             <a:r>
-              <a:rPr lang="en-US" smtClean="0"/>
+              <a:rPr lang="en-US"/>
               <a:t>Click to edit Master text styles</a:t>
             </a:r>
           </a:p>
@@ -1068,7 +1075,7 @@
           <a:p>
             <a:fld id="{5BCAD085-E8A6-8845-BD4E-CB4CCA059FC4}" type="datetimeFigureOut">
               <a:rPr lang="en-US" smtClean="0"/>
-              <a:t>1/27/13</a:t>
+              <a:t>6/13/2026</a:t>
             </a:fld>
             <a:endParaRPr lang="en-US"/>
           </a:p>
@@ -1162,10 +1169,9 @@
           <a:lstStyle/>
           <a:p>
             <a:r>
-              <a:rPr lang="en-US" smtClean="0"/>
+              <a:rPr lang="en-US"/>
               <a:t>Click to edit Master title style</a:t>
             </a:r>
-            <a:endParaRPr lang="en-US"/>
           </a:p>
         </p:txBody>
       </p:sp>
@@ -1219,38 +1225,37 @@
           <a:p>
             <a:pPr lvl="0"/>
             <a:r>
-              <a:rPr lang="en-US" smtClean="0"/>
+              <a:rPr lang="en-US"/>
               <a:t>Click to edit Master text styles</a:t>
             </a:r>
           </a:p>
           <a:p>
             <a:pPr lvl="1"/>
             <a:r>
-              <a:rPr lang="en-US" smtClean="0"/>
+              <a:rPr lang="en-US"/>
               <a:t>Second level</a:t>
             </a:r>
           </a:p>
           <a:p>
             <a:pPr lvl="2"/>
             <a:r>
-              <a:rPr lang="en-US" smtClean="0"/>
+              <a:rPr lang="en-US"/>
               <a:t>Third level</a:t>
             </a:r>
           </a:p>
           <a:p>
             <a:pPr lvl="3"/>
             <a:r>
-              <a:rPr lang="en-US" smtClean="0"/>
+              <a:rPr lang="en-US"/>
               <a:t>Fourth level</a:t>
             </a:r>
           </a:p>
           <a:p>
             <a:pPr lvl="4"/>
             <a:r>
-              <a:rPr lang="en-US" smtClean="0"/>
+              <a:rPr lang="en-US"/>
               <a:t>Fifth level</a:t>
             </a:r>
-            <a:endParaRPr lang="en-US"/>
           </a:p>
         </p:txBody>
       </p:sp>
@@ -1304,38 +1309,37 @@
           <a:p>
             <a:pPr lvl="0"/>
             <a:r>
-              <a:rPr lang="en-US" smtClean="0"/>
+              <a:rPr lang="en-US"/>
               <a:t>Click to edit Master text styles</a:t>
             </a:r>
           </a:p>
           <a:p>
             <a:pPr lvl="1"/>
             <a:r>
-              <a:rPr lang="en-US" smtClean="0"/>
+              <a:rPr lang="en-US"/>
               <a:t>Second level</a:t>
             </a:r>
           </a:p>
           <a:p>
             <a:pPr lvl="2"/>
             <a:r>
-              <a:rPr lang="en-US" smtClean="0"/>
+              <a:rPr lang="en-US"/>
               <a:t>Third level</a:t>
             </a:r>
           </a:p>
           <a:p>
             <a:pPr lvl="3"/>
             <a:r>
-              <a:rPr lang="en-US" smtClean="0"/>
+              <a:rPr lang="en-US"/>
               <a:t>Fourth level</a:t>
             </a:r>
           </a:p>
           <a:p>
             <a:pPr lvl="4"/>
             <a:r>
-              <a:rPr lang="en-US" smtClean="0"/>
+              <a:rPr lang="en-US"/>
               <a:t>Fifth level</a:t>
             </a:r>
-            <a:endParaRPr lang="en-US"/>
           </a:p>
         </p:txBody>
       </p:sp>
@@ -1356,7 +1360,7 @@
           <a:p>
             <a:fld id="{5BCAD085-E8A6-8845-BD4E-CB4CCA059FC4}" type="datetimeFigureOut">
               <a:rPr lang="en-US" smtClean="0"/>
-              <a:t>1/27/13</a:t>
+              <a:t>6/13/2026</a:t>
             </a:fld>
             <a:endParaRPr lang="en-US"/>
           </a:p>
@@ -1454,10 +1458,9 @@
           </a:lstStyle>
           <a:p>
             <a:r>
-              <a:rPr lang="en-US" smtClean="0"/>
+              <a:rPr lang="en-US"/>
               <a:t>Click to edit Master title style</a:t>
             </a:r>
-            <a:endParaRPr lang="en-US"/>
           </a:p>
         </p:txBody>
       </p:sp>
@@ -1520,7 +1523,7 @@
           <a:p>
             <a:pPr lvl="0"/>
             <a:r>
-              <a:rPr lang="en-US" smtClean="0"/>
+              <a:rPr lang="en-US"/>
               <a:t>Click to edit Master text styles</a:t>
             </a:r>
           </a:p>
@@ -1576,38 +1579,37 @@
           <a:p>
             <a:pPr lvl="0"/>
             <a:r>
-              <a:rPr lang="en-US" smtClean="0"/>
+              <a:rPr lang="en-US"/>
               <a:t>Click to edit Master text styles</a:t>
             </a:r>
           </a:p>
           <a:p>
             <a:pPr lvl="1"/>
             <a:r>
-              <a:rPr lang="en-US" smtClean="0"/>
+              <a:rPr lang="en-US"/>
               <a:t>Second level</a:t>
             </a:r>
           </a:p>
           <a:p>
             <a:pPr lvl="2"/>
             <a:r>
-              <a:rPr lang="en-US" smtClean="0"/>
+              <a:rPr lang="en-US"/>
               <a:t>Third level</a:t>
             </a:r>
           </a:p>
           <a:p>
             <a:pPr lvl="3"/>
             <a:r>
-              <a:rPr lang="en-US" smtClean="0"/>
+              <a:rPr lang="en-US"/>
               <a:t>Fourth level</a:t>
             </a:r>
           </a:p>
           <a:p>
             <a:pPr lvl="4"/>
             <a:r>
-              <a:rPr lang="en-US" smtClean="0"/>
+              <a:rPr lang="en-US"/>
               <a:t>Fifth level</a:t>
             </a:r>
-            <a:endParaRPr lang="en-US"/>
           </a:p>
         </p:txBody>
       </p:sp>
@@ -1670,7 +1672,7 @@
           <a:p>
             <a:pPr lvl="0"/>
             <a:r>
-              <a:rPr lang="en-US" smtClean="0"/>
+              <a:rPr lang="en-US"/>
               <a:t>Click to edit Master text styles</a:t>
             </a:r>
           </a:p>
@@ -1726,38 +1728,37 @@
           <a:p>
             <a:pPr lvl="0"/>
             <a:r>
-              <a:rPr lang="en-US" smtClean="0"/>
+              <a:rPr lang="en-US"/>
               <a:t>Click to edit Master text styles</a:t>
             </a:r>
           </a:p>
           <a:p>
             <a:pPr lvl="1"/>
             <a:r>
-              <a:rPr lang="en-US" smtClean="0"/>
+              <a:rPr lang="en-US"/>
               <a:t>Second level</a:t>
             </a:r>
           </a:p>
           <a:p>
             <a:pPr lvl="2"/>
             <a:r>
-              <a:rPr lang="en-US" smtClean="0"/>
+              <a:rPr lang="en-US"/>
               <a:t>Third level</a:t>
             </a:r>
           </a:p>
           <a:p>
             <a:pPr lvl="3"/>
             <a:r>
-              <a:rPr lang="en-US" smtClean="0"/>
+              <a:rPr lang="en-US"/>
               <a:t>Fourth level</a:t>
             </a:r>
           </a:p>
           <a:p>
             <a:pPr lvl="4"/>
             <a:r>
-              <a:rPr lang="en-US" smtClean="0"/>
+              <a:rPr lang="en-US"/>
               <a:t>Fifth level</a:t>
             </a:r>
-            <a:endParaRPr lang="en-US"/>
           </a:p>
         </p:txBody>
       </p:sp>
@@ -1778,7 +1779,7 @@
           <a:p>
             <a:fld id="{5BCAD085-E8A6-8845-BD4E-CB4CCA059FC4}" type="datetimeFigureOut">
               <a:rPr lang="en-US" smtClean="0"/>
-              <a:t>1/27/13</a:t>
+              <a:t>6/13/2026</a:t>
             </a:fld>
             <a:endParaRPr lang="en-US"/>
           </a:p>
@@ -1872,10 +1873,9 @@
           <a:lstStyle/>
           <a:p>
             <a:r>
-              <a:rPr lang="en-US" smtClean="0"/>
+              <a:rPr lang="en-US"/>
               <a:t>Click to edit Master title style</a:t>
             </a:r>
-            <a:endParaRPr lang="en-US"/>
           </a:p>
         </p:txBody>
       </p:sp>
@@ -1896,7 +1896,7 @@
           <a:p>
             <a:fld id="{5BCAD085-E8A6-8845-BD4E-CB4CCA059FC4}" type="datetimeFigureOut">
               <a:rPr lang="en-US" smtClean="0"/>
-              <a:t>1/27/13</a:t>
+              <a:t>6/13/2026</a:t>
             </a:fld>
             <a:endParaRPr lang="en-US"/>
           </a:p>
@@ -1991,7 +1991,7 @@
           <a:p>
             <a:fld id="{5BCAD085-E8A6-8845-BD4E-CB4CCA059FC4}" type="datetimeFigureOut">
               <a:rPr lang="en-US" smtClean="0"/>
-              <a:t>1/27/13</a:t>
+              <a:t>6/13/2026</a:t>
             </a:fld>
             <a:endParaRPr lang="en-US"/>
           </a:p>
@@ -2094,10 +2094,9 @@
           </a:lstStyle>
           <a:p>
             <a:r>
-              <a:rPr lang="en-US" smtClean="0"/>
+              <a:rPr lang="en-US"/>
               <a:t>Click to edit Master title style</a:t>
             </a:r>
-            <a:endParaRPr lang="en-US"/>
           </a:p>
         </p:txBody>
       </p:sp>
@@ -2151,38 +2150,37 @@
           <a:p>
             <a:pPr lvl="0"/>
             <a:r>
-              <a:rPr lang="en-US" smtClean="0"/>
+              <a:rPr lang="en-US"/>
               <a:t>Click to edit Master text styles</a:t>
             </a:r>
           </a:p>
           <a:p>
             <a:pPr lvl="1"/>
             <a:r>
-              <a:rPr lang="en-US" smtClean="0"/>
+              <a:rPr lang="en-US"/>
               <a:t>Second level</a:t>
             </a:r>
           </a:p>
           <a:p>
             <a:pPr lvl="2"/>
             <a:r>
-              <a:rPr lang="en-US" smtClean="0"/>
+              <a:rPr lang="en-US"/>
               <a:t>Third level</a:t>
             </a:r>
           </a:p>
           <a:p>
             <a:pPr lvl="3"/>
             <a:r>
-              <a:rPr lang="en-US" smtClean="0"/>
+              <a:rPr lang="en-US"/>
               <a:t>Fourth level</a:t>
             </a:r>
           </a:p>
           <a:p>
             <a:pPr lvl="4"/>
             <a:r>
-              <a:rPr lang="en-US" smtClean="0"/>
+              <a:rPr lang="en-US"/>
               <a:t>Fifth level</a:t>
             </a:r>
-            <a:endParaRPr lang="en-US"/>
           </a:p>
         </p:txBody>
       </p:sp>
@@ -2245,7 +2243,7 @@
           <a:p>
             <a:pPr lvl="0"/>
             <a:r>
-              <a:rPr lang="en-US" smtClean="0"/>
+              <a:rPr lang="en-US"/>
               <a:t>Click to edit Master text styles</a:t>
             </a:r>
           </a:p>
@@ -2268,7 +2266,7 @@
           <a:p>
             <a:fld id="{5BCAD085-E8A6-8845-BD4E-CB4CCA059FC4}" type="datetimeFigureOut">
               <a:rPr lang="en-US" smtClean="0"/>
-              <a:t>1/27/13</a:t>
+              <a:t>6/13/2026</a:t>
             </a:fld>
             <a:endParaRPr lang="en-US"/>
           </a:p>
@@ -2371,10 +2369,9 @@
           </a:lstStyle>
           <a:p>
             <a:r>
-              <a:rPr lang="en-US" smtClean="0"/>
+              <a:rPr lang="en-US"/>
               <a:t>Click to edit Master title style</a:t>
             </a:r>
-            <a:endParaRPr lang="en-US"/>
           </a:p>
         </p:txBody>
       </p:sp>
@@ -2498,7 +2495,7 @@
           <a:p>
             <a:pPr lvl="0"/>
             <a:r>
-              <a:rPr lang="en-US" smtClean="0"/>
+              <a:rPr lang="en-US"/>
               <a:t>Click to edit Master text styles</a:t>
             </a:r>
           </a:p>
@@ -2521,7 +2518,7 @@
           <a:p>
             <a:fld id="{5BCAD085-E8A6-8845-BD4E-CB4CCA059FC4}" type="datetimeFigureOut">
               <a:rPr lang="en-US" smtClean="0"/>
-              <a:t>1/27/13</a:t>
+              <a:t>6/13/2026</a:t>
             </a:fld>
             <a:endParaRPr lang="en-US"/>
           </a:p>
@@ -2630,10 +2627,9 @@
           <a:lstStyle/>
           <a:p>
             <a:r>
-              <a:rPr lang="en-US" smtClean="0"/>
+              <a:rPr lang="en-US"/>
               <a:t>Click to edit Master title style</a:t>
             </a:r>
-            <a:endParaRPr lang="en-US"/>
           </a:p>
         </p:txBody>
       </p:sp>
@@ -2664,38 +2660,37 @@
           <a:p>
             <a:pPr lvl="0"/>
             <a:r>
-              <a:rPr lang="en-US" smtClean="0"/>
+              <a:rPr lang="en-US"/>
               <a:t>Click to edit Master text styles</a:t>
             </a:r>
           </a:p>
           <a:p>
             <a:pPr lvl="1"/>
             <a:r>
-              <a:rPr lang="en-US" smtClean="0"/>
+              <a:rPr lang="en-US"/>
               <a:t>Second level</a:t>
             </a:r>
           </a:p>
           <a:p>
             <a:pPr lvl="2"/>
             <a:r>
-              <a:rPr lang="en-US" smtClean="0"/>
+              <a:rPr lang="en-US"/>
               <a:t>Third level</a:t>
             </a:r>
           </a:p>
           <a:p>
             <a:pPr lvl="3"/>
             <a:r>
-              <a:rPr lang="en-US" smtClean="0"/>
+              <a:rPr lang="en-US"/>
               <a:t>Fourth level</a:t>
             </a:r>
           </a:p>
           <a:p>
             <a:pPr lvl="4"/>
             <a:r>
-              <a:rPr lang="en-US" smtClean="0"/>
+              <a:rPr lang="en-US"/>
               <a:t>Fifth level</a:t>
             </a:r>
-            <a:endParaRPr lang="en-US"/>
           </a:p>
         </p:txBody>
       </p:sp>
@@ -2734,7 +2729,7 @@
           <a:p>
             <a:fld id="{5BCAD085-E8A6-8845-BD4E-CB4CCA059FC4}" type="datetimeFigureOut">
               <a:rPr lang="en-US" smtClean="0"/>
-              <a:t>1/27/13</a:t>
+              <a:t>6/13/2026</a:t>
             </a:fld>
             <a:endParaRPr lang="en-US"/>
           </a:p>
@@ -3093,7 +3088,7 @@
 </file>
 
 <file path=ppt/slides/slide1.xml><?xml version="1.0" encoding="utf-8"?>
-<p:sld xmlns:a="http://schemas.openxmlformats.org/drawingml/2006/main" xmlns:p="http://schemas.openxmlformats.org/presentationml/2006/main" xmlns:r="http://schemas.openxmlformats.org/officeDocument/2006/relationships">
+<p:sld xmlns:a="http://schemas.openxmlformats.org/drawingml/2006/main" xmlns:r="http://schemas.openxmlformats.org/officeDocument/2006/relationships" xmlns:p="http://schemas.openxmlformats.org/presentationml/2006/main">
   <p:cSld>
     <p:spTree>
       <p:nvGrpSpPr>
@@ -3101,7 +3096,14 @@
         <p:cNvGrpSpPr/>
         <p:nvPr/>
       </p:nvGrpSpPr>
-      <p:grpSpPr/>
+      <p:grpSpPr>
+        <a:xfrm>
+          <a:off x="0" y="0"/>
+          <a:ext cx="0" cy="0"/>
+          <a:chOff x="0" y="0"/>
+          <a:chExt cx="0" cy="0"/>
+        </a:xfrm>
+      </p:grpSpPr>
       <p:sp>
         <p:nvSpPr>
           <p:cNvPr id="2" name="Rectangle 1"/>
@@ -3144,6 +3146,7 @@
           <a:lstStyle/>
           <a:p>
             <a:pPr algn="ctr"/>
+            <a:endParaRPr/>
           </a:p>
         </p:txBody>
       </p:sp>
@@ -3189,6 +3192,7 @@
           <a:lstStyle/>
           <a:p>
             <a:pPr algn="ctr"/>
+            <a:endParaRPr/>
           </a:p>
         </p:txBody>
       </p:sp>
@@ -3306,6 +3310,7 @@
           <a:lstStyle/>
           <a:p>
             <a:pPr algn="ctr"/>
+            <a:endParaRPr/>
           </a:p>
         </p:txBody>
       </p:sp>
@@ -3426,6 +3431,7 @@
                 <a:latin typeface="Calibri"/>
               </a:defRPr>
             </a:pPr>
+            <a:endParaRPr/>
           </a:p>
           <a:p>
             <a:pPr algn="l">
@@ -3454,7 +3460,7 @@
 </file>
 
 <file path=ppt/slides/slide10.xml><?xml version="1.0" encoding="utf-8"?>
-<p:sld xmlns:a="http://schemas.openxmlformats.org/drawingml/2006/main" xmlns:p="http://schemas.openxmlformats.org/presentationml/2006/main" xmlns:r="http://schemas.openxmlformats.org/officeDocument/2006/relationships">
+<p:sld xmlns:a="http://schemas.openxmlformats.org/drawingml/2006/main" xmlns:r="http://schemas.openxmlformats.org/officeDocument/2006/relationships" xmlns:p="http://schemas.openxmlformats.org/presentationml/2006/main">
   <p:cSld>
     <p:spTree>
       <p:nvGrpSpPr>
@@ -3462,7 +3468,14 @@
         <p:cNvGrpSpPr/>
         <p:nvPr/>
       </p:nvGrpSpPr>
-      <p:grpSpPr/>
+      <p:grpSpPr>
+        <a:xfrm>
+          <a:off x="0" y="0"/>
+          <a:ext cx="0" cy="0"/>
+          <a:chOff x="0" y="0"/>
+          <a:chExt cx="0" cy="0"/>
+        </a:xfrm>
+      </p:grpSpPr>
       <p:sp>
         <p:nvSpPr>
           <p:cNvPr id="2" name="Rectangle 1"/>
@@ -3505,6 +3518,7 @@
           <a:lstStyle/>
           <a:p>
             <a:pPr algn="ctr"/>
+            <a:endParaRPr/>
           </a:p>
         </p:txBody>
       </p:sp>
@@ -3550,6 +3564,7 @@
           <a:lstStyle/>
           <a:p>
             <a:pPr algn="ctr"/>
+            <a:endParaRPr/>
           </a:p>
         </p:txBody>
       </p:sp>
@@ -3631,6 +3646,7 @@
           <a:lstStyle/>
           <a:p>
             <a:pPr algn="ctr"/>
+            <a:endParaRPr/>
           </a:p>
         </p:txBody>
       </p:sp>
@@ -3676,6 +3692,7 @@
           <a:lstStyle/>
           <a:p>
             <a:pPr algn="ctr"/>
+            <a:endParaRPr/>
           </a:p>
         </p:txBody>
       </p:sp>
@@ -3728,6 +3745,7 @@
                 <a:latin typeface="Calibri"/>
               </a:defRPr>
             </a:pPr>
+            <a:endParaRPr/>
           </a:p>
           <a:p>
             <a:pPr algn="l">
@@ -3805,6 +3823,7 @@
                 <a:latin typeface="Calibri"/>
               </a:defRPr>
             </a:pPr>
+            <a:endParaRPr/>
           </a:p>
           <a:p>
             <a:pPr algn="l">
@@ -3882,6 +3901,7 @@
           <a:lstStyle/>
           <a:p>
             <a:pPr algn="ctr"/>
+            <a:endParaRPr/>
           </a:p>
         </p:txBody>
       </p:sp>
@@ -3934,6 +3954,7 @@
                 <a:latin typeface="Calibri"/>
               </a:defRPr>
             </a:pPr>
+            <a:endParaRPr/>
           </a:p>
           <a:p>
             <a:pPr algn="l">
@@ -4011,6 +4032,7 @@
                 <a:latin typeface="Calibri"/>
               </a:defRPr>
             </a:pPr>
+            <a:endParaRPr/>
           </a:p>
           <a:p>
             <a:pPr algn="l">
@@ -4088,6 +4110,7 @@
           <a:lstStyle/>
           <a:p>
             <a:pPr algn="ctr"/>
+            <a:endParaRPr/>
           </a:p>
         </p:txBody>
       </p:sp>
@@ -4140,6 +4163,7 @@
                 <a:latin typeface="Calibri"/>
               </a:defRPr>
             </a:pPr>
+            <a:endParaRPr/>
           </a:p>
           <a:p>
             <a:pPr algn="l">
@@ -4217,6 +4241,7 @@
                 <a:latin typeface="Calibri"/>
               </a:defRPr>
             </a:pPr>
+            <a:endParaRPr/>
           </a:p>
           <a:p>
             <a:pPr algn="l">
@@ -4245,7 +4270,7 @@
 </file>
 
 <file path=ppt/slides/slide11.xml><?xml version="1.0" encoding="utf-8"?>
-<p:sld xmlns:a="http://schemas.openxmlformats.org/drawingml/2006/main" xmlns:p="http://schemas.openxmlformats.org/presentationml/2006/main" xmlns:r="http://schemas.openxmlformats.org/officeDocument/2006/relationships">
+<p:sld xmlns:a="http://schemas.openxmlformats.org/drawingml/2006/main" xmlns:r="http://schemas.openxmlformats.org/officeDocument/2006/relationships" xmlns:p="http://schemas.openxmlformats.org/presentationml/2006/main">
   <p:cSld>
     <p:spTree>
       <p:nvGrpSpPr>
@@ -4253,7 +4278,14 @@
         <p:cNvGrpSpPr/>
         <p:nvPr/>
       </p:nvGrpSpPr>
-      <p:grpSpPr/>
+      <p:grpSpPr>
+        <a:xfrm>
+          <a:off x="0" y="0"/>
+          <a:ext cx="0" cy="0"/>
+          <a:chOff x="0" y="0"/>
+          <a:chExt cx="0" cy="0"/>
+        </a:xfrm>
+      </p:grpSpPr>
       <p:sp>
         <p:nvSpPr>
           <p:cNvPr id="2" name="Rectangle 1"/>
@@ -4296,6 +4328,7 @@
           <a:lstStyle/>
           <a:p>
             <a:pPr algn="ctr"/>
+            <a:endParaRPr/>
           </a:p>
         </p:txBody>
       </p:sp>
@@ -4341,6 +4374,7 @@
           <a:lstStyle/>
           <a:p>
             <a:pPr algn="ctr"/>
+            <a:endParaRPr/>
           </a:p>
         </p:txBody>
       </p:sp>
@@ -4422,6 +4456,7 @@
           <a:lstStyle/>
           <a:p>
             <a:pPr algn="ctr"/>
+            <a:endParaRPr/>
           </a:p>
         </p:txBody>
       </p:sp>
@@ -4467,6 +4502,7 @@
           <a:lstStyle/>
           <a:p>
             <a:pPr algn="ctr"/>
+            <a:endParaRPr/>
           </a:p>
         </p:txBody>
       </p:sp>
@@ -4628,6 +4664,7 @@
           <a:lstStyle/>
           <a:p>
             <a:pPr algn="ctr"/>
+            <a:endParaRPr/>
           </a:p>
         </p:txBody>
       </p:sp>
@@ -4789,6 +4826,7 @@
           <a:lstStyle/>
           <a:p>
             <a:pPr algn="ctr"/>
+            <a:endParaRPr/>
           </a:p>
         </p:txBody>
       </p:sp>
@@ -4950,6 +4988,7 @@
           <a:lstStyle/>
           <a:p>
             <a:pPr algn="ctr"/>
+            <a:endParaRPr/>
           </a:p>
         </p:txBody>
       </p:sp>
@@ -5111,6 +5150,7 @@
           <a:lstStyle/>
           <a:p>
             <a:pPr algn="ctr"/>
+            <a:endParaRPr/>
           </a:p>
         </p:txBody>
       </p:sp>
@@ -5272,6 +5312,7 @@
           <a:lstStyle/>
           <a:p>
             <a:pPr algn="ctr"/>
+            <a:endParaRPr/>
           </a:p>
         </p:txBody>
       </p:sp>
@@ -5433,6 +5474,7 @@
           <a:lstStyle/>
           <a:p>
             <a:pPr algn="ctr"/>
+            <a:endParaRPr/>
           </a:p>
         </p:txBody>
       </p:sp>
@@ -5478,6 +5520,7 @@
           <a:lstStyle/>
           <a:p>
             <a:pPr algn="ctr"/>
+            <a:endParaRPr/>
           </a:p>
         </p:txBody>
       </p:sp>
@@ -5530,6 +5573,7 @@
                 <a:latin typeface="Calibri"/>
               </a:defRPr>
             </a:pPr>
+            <a:endParaRPr/>
           </a:p>
           <a:p>
             <a:pPr algn="l">
@@ -5671,6 +5715,7 @@
           <a:lstStyle/>
           <a:p>
             <a:pPr algn="ctr"/>
+            <a:endParaRPr/>
           </a:p>
         </p:txBody>
       </p:sp>
@@ -5723,6 +5768,7 @@
                 <a:latin typeface="Calibri"/>
               </a:defRPr>
             </a:pPr>
+            <a:endParaRPr/>
           </a:p>
           <a:p>
             <a:pPr algn="l">
@@ -5831,7 +5877,7 @@
 </file>
 
 <file path=ppt/slides/slide12.xml><?xml version="1.0" encoding="utf-8"?>
-<p:sld xmlns:a="http://schemas.openxmlformats.org/drawingml/2006/main" xmlns:p="http://schemas.openxmlformats.org/presentationml/2006/main" xmlns:r="http://schemas.openxmlformats.org/officeDocument/2006/relationships">
+<p:sld xmlns:a="http://schemas.openxmlformats.org/drawingml/2006/main" xmlns:r="http://schemas.openxmlformats.org/officeDocument/2006/relationships" xmlns:p="http://schemas.openxmlformats.org/presentationml/2006/main">
   <p:cSld>
     <p:spTree>
       <p:nvGrpSpPr>
@@ -5839,7 +5885,14 @@
         <p:cNvGrpSpPr/>
         <p:nvPr/>
       </p:nvGrpSpPr>
-      <p:grpSpPr/>
+      <p:grpSpPr>
+        <a:xfrm>
+          <a:off x="0" y="0"/>
+          <a:ext cx="0" cy="0"/>
+          <a:chOff x="0" y="0"/>
+          <a:chExt cx="0" cy="0"/>
+        </a:xfrm>
+      </p:grpSpPr>
       <p:sp>
         <p:nvSpPr>
           <p:cNvPr id="2" name="Rectangle 1"/>
@@ -5882,6 +5935,7 @@
           <a:lstStyle/>
           <a:p>
             <a:pPr algn="ctr"/>
+            <a:endParaRPr/>
           </a:p>
         </p:txBody>
       </p:sp>
@@ -5927,6 +5981,7 @@
           <a:lstStyle/>
           <a:p>
             <a:pPr algn="ctr"/>
+            <a:endParaRPr/>
           </a:p>
         </p:txBody>
       </p:sp>
@@ -6008,6 +6063,7 @@
           <a:lstStyle/>
           <a:p>
             <a:pPr algn="ctr"/>
+            <a:endParaRPr/>
           </a:p>
         </p:txBody>
       </p:sp>
@@ -6161,6 +6217,7 @@
           <a:lstStyle/>
           <a:p>
             <a:pPr algn="ctr"/>
+            <a:endParaRPr/>
           </a:p>
         </p:txBody>
       </p:sp>
@@ -6242,6 +6299,7 @@
           <a:lstStyle/>
           <a:p>
             <a:pPr algn="ctr"/>
+            <a:endParaRPr/>
           </a:p>
         </p:txBody>
       </p:sp>
@@ -6287,6 +6345,7 @@
           <a:lstStyle/>
           <a:p>
             <a:pPr algn="ctr"/>
+            <a:endParaRPr/>
           </a:p>
         </p:txBody>
       </p:sp>
@@ -6372,6 +6431,7 @@
           <a:lstStyle/>
           <a:p>
             <a:pPr algn="ctr"/>
+            <a:endParaRPr/>
           </a:p>
         </p:txBody>
       </p:sp>
@@ -6417,6 +6477,7 @@
           <a:lstStyle/>
           <a:p>
             <a:pPr algn="ctr"/>
+            <a:endParaRPr/>
           </a:p>
         </p:txBody>
       </p:sp>
@@ -6502,6 +6563,7 @@
           <a:lstStyle/>
           <a:p>
             <a:pPr algn="ctr"/>
+            <a:endParaRPr/>
           </a:p>
         </p:txBody>
       </p:sp>
@@ -6583,6 +6645,7 @@
           <a:lstStyle/>
           <a:p>
             <a:pPr algn="ctr"/>
+            <a:endParaRPr/>
           </a:p>
         </p:txBody>
       </p:sp>
@@ -6628,6 +6691,7 @@
           <a:lstStyle/>
           <a:p>
             <a:pPr algn="ctr"/>
+            <a:endParaRPr/>
           </a:p>
         </p:txBody>
       </p:sp>
@@ -6713,6 +6777,7 @@
           <a:lstStyle/>
           <a:p>
             <a:pPr algn="ctr"/>
+            <a:endParaRPr/>
           </a:p>
         </p:txBody>
       </p:sp>
@@ -6758,6 +6823,7 @@
           <a:lstStyle/>
           <a:p>
             <a:pPr algn="ctr"/>
+            <a:endParaRPr/>
           </a:p>
         </p:txBody>
       </p:sp>
@@ -6843,6 +6909,7 @@
           <a:lstStyle/>
           <a:p>
             <a:pPr algn="ctr"/>
+            <a:endParaRPr/>
           </a:p>
         </p:txBody>
       </p:sp>
@@ -6924,6 +6991,7 @@
           <a:lstStyle/>
           <a:p>
             <a:pPr algn="ctr"/>
+            <a:endParaRPr/>
           </a:p>
         </p:txBody>
       </p:sp>
@@ -6969,6 +7037,7 @@
           <a:lstStyle/>
           <a:p>
             <a:pPr algn="ctr"/>
+            <a:endParaRPr/>
           </a:p>
         </p:txBody>
       </p:sp>
@@ -7054,6 +7123,7 @@
           <a:lstStyle/>
           <a:p>
             <a:pPr algn="ctr"/>
+            <a:endParaRPr/>
           </a:p>
         </p:txBody>
       </p:sp>
@@ -7099,6 +7169,7 @@
           <a:lstStyle/>
           <a:p>
             <a:pPr algn="ctr"/>
+            <a:endParaRPr/>
           </a:p>
         </p:txBody>
       </p:sp>
@@ -7184,6 +7255,7 @@
           <a:lstStyle/>
           <a:p>
             <a:pPr algn="ctr"/>
+            <a:endParaRPr/>
           </a:p>
         </p:txBody>
       </p:sp>
@@ -7265,6 +7337,7 @@
           <a:lstStyle/>
           <a:p>
             <a:pPr algn="ctr"/>
+            <a:endParaRPr/>
           </a:p>
         </p:txBody>
       </p:sp>
@@ -7310,6 +7383,7 @@
           <a:lstStyle/>
           <a:p>
             <a:pPr algn="ctr"/>
+            <a:endParaRPr/>
           </a:p>
         </p:txBody>
       </p:sp>
@@ -7395,6 +7469,7 @@
           <a:lstStyle/>
           <a:p>
             <a:pPr algn="ctr"/>
+            <a:endParaRPr/>
           </a:p>
         </p:txBody>
       </p:sp>
@@ -7440,6 +7515,7 @@
           <a:lstStyle/>
           <a:p>
             <a:pPr algn="ctr"/>
+            <a:endParaRPr/>
           </a:p>
         </p:txBody>
       </p:sp>
@@ -7525,6 +7601,7 @@
           <a:lstStyle/>
           <a:p>
             <a:pPr algn="ctr"/>
+            <a:endParaRPr/>
           </a:p>
         </p:txBody>
       </p:sp>
@@ -7606,6 +7683,7 @@
           <a:lstStyle/>
           <a:p>
             <a:pPr algn="ctr"/>
+            <a:endParaRPr/>
           </a:p>
         </p:txBody>
       </p:sp>
@@ -7651,6 +7729,7 @@
           <a:lstStyle/>
           <a:p>
             <a:pPr algn="ctr"/>
+            <a:endParaRPr/>
           </a:p>
         </p:txBody>
       </p:sp>
@@ -7736,6 +7815,7 @@
           <a:lstStyle/>
           <a:p>
             <a:pPr algn="ctr"/>
+            <a:endParaRPr/>
           </a:p>
         </p:txBody>
       </p:sp>
@@ -7781,6 +7861,7 @@
           <a:lstStyle/>
           <a:p>
             <a:pPr algn="ctr"/>
+            <a:endParaRPr/>
           </a:p>
         </p:txBody>
       </p:sp>
@@ -7833,7 +7914,7 @@
 </file>
 
 <file path=ppt/slides/slide13.xml><?xml version="1.0" encoding="utf-8"?>
-<p:sld xmlns:a="http://schemas.openxmlformats.org/drawingml/2006/main" xmlns:p="http://schemas.openxmlformats.org/presentationml/2006/main" xmlns:r="http://schemas.openxmlformats.org/officeDocument/2006/relationships">
+<p:sld xmlns:a="http://schemas.openxmlformats.org/drawingml/2006/main" xmlns:r="http://schemas.openxmlformats.org/officeDocument/2006/relationships" xmlns:p="http://schemas.openxmlformats.org/presentationml/2006/main">
   <p:cSld>
     <p:spTree>
       <p:nvGrpSpPr>
@@ -7841,7 +7922,14 @@
         <p:cNvGrpSpPr/>
         <p:nvPr/>
       </p:nvGrpSpPr>
-      <p:grpSpPr/>
+      <p:grpSpPr>
+        <a:xfrm>
+          <a:off x="0" y="0"/>
+          <a:ext cx="0" cy="0"/>
+          <a:chOff x="0" y="0"/>
+          <a:chExt cx="0" cy="0"/>
+        </a:xfrm>
+      </p:grpSpPr>
       <p:sp>
         <p:nvSpPr>
           <p:cNvPr id="2" name="Rectangle 1"/>
@@ -7884,6 +7972,7 @@
           <a:lstStyle/>
           <a:p>
             <a:pPr algn="ctr"/>
+            <a:endParaRPr/>
           </a:p>
         </p:txBody>
       </p:sp>
@@ -7929,6 +8018,7 @@
           <a:lstStyle/>
           <a:p>
             <a:pPr algn="ctr"/>
+            <a:endParaRPr/>
           </a:p>
         </p:txBody>
       </p:sp>
@@ -8010,6 +8100,7 @@
           <a:lstStyle/>
           <a:p>
             <a:pPr algn="ctr"/>
+            <a:endParaRPr/>
           </a:p>
         </p:txBody>
       </p:sp>
@@ -8055,6 +8146,7 @@
           <a:lstStyle/>
           <a:p>
             <a:pPr algn="ctr"/>
+            <a:endParaRPr/>
           </a:p>
         </p:txBody>
       </p:sp>
@@ -8100,6 +8192,7 @@
           <a:lstStyle/>
           <a:p>
             <a:pPr algn="ctr"/>
+            <a:endParaRPr/>
           </a:p>
         </p:txBody>
       </p:sp>
@@ -8505,6 +8598,7 @@
           <a:lstStyle/>
           <a:p>
             <a:pPr algn="ctr"/>
+            <a:endParaRPr/>
           </a:p>
         </p:txBody>
       </p:sp>
@@ -8550,6 +8644,7 @@
           <a:lstStyle/>
           <a:p>
             <a:pPr algn="ctr"/>
+            <a:endParaRPr/>
           </a:p>
         </p:txBody>
       </p:sp>
@@ -8883,6 +8978,7 @@
           <a:lstStyle/>
           <a:p>
             <a:pPr algn="ctr"/>
+            <a:endParaRPr/>
           </a:p>
         </p:txBody>
       </p:sp>
@@ -8931,7 +9027,7 @@
 </file>
 
 <file path=ppt/slides/slide14.xml><?xml version="1.0" encoding="utf-8"?>
-<p:sld xmlns:a="http://schemas.openxmlformats.org/drawingml/2006/main" xmlns:p="http://schemas.openxmlformats.org/presentationml/2006/main" xmlns:r="http://schemas.openxmlformats.org/officeDocument/2006/relationships">
+<p:sld xmlns:a="http://schemas.openxmlformats.org/drawingml/2006/main" xmlns:r="http://schemas.openxmlformats.org/officeDocument/2006/relationships" xmlns:p="http://schemas.openxmlformats.org/presentationml/2006/main">
   <p:cSld>
     <p:spTree>
       <p:nvGrpSpPr>
@@ -8939,7 +9035,14 @@
         <p:cNvGrpSpPr/>
         <p:nvPr/>
       </p:nvGrpSpPr>
-      <p:grpSpPr/>
+      <p:grpSpPr>
+        <a:xfrm>
+          <a:off x="0" y="0"/>
+          <a:ext cx="0" cy="0"/>
+          <a:chOff x="0" y="0"/>
+          <a:chExt cx="0" cy="0"/>
+        </a:xfrm>
+      </p:grpSpPr>
       <p:sp>
         <p:nvSpPr>
           <p:cNvPr id="2" name="Rectangle 1"/>
@@ -8982,6 +9085,7 @@
           <a:lstStyle/>
           <a:p>
             <a:pPr algn="ctr"/>
+            <a:endParaRPr/>
           </a:p>
         </p:txBody>
       </p:sp>
@@ -9027,6 +9131,7 @@
           <a:lstStyle/>
           <a:p>
             <a:pPr algn="ctr"/>
+            <a:endParaRPr/>
           </a:p>
         </p:txBody>
       </p:sp>
@@ -9108,6 +9213,7 @@
           <a:lstStyle/>
           <a:p>
             <a:pPr algn="ctr"/>
+            <a:endParaRPr/>
           </a:p>
         </p:txBody>
       </p:sp>
@@ -9153,6 +9259,7 @@
           <a:lstStyle/>
           <a:p>
             <a:pPr algn="ctr"/>
+            <a:endParaRPr/>
           </a:p>
         </p:txBody>
       </p:sp>
@@ -9205,6 +9312,7 @@
                 <a:latin typeface="Calibri"/>
               </a:defRPr>
             </a:pPr>
+            <a:endParaRPr/>
           </a:p>
           <a:p>
             <a:pPr algn="l">
@@ -9378,6 +9486,7 @@
           <a:lstStyle/>
           <a:p>
             <a:pPr algn="ctr"/>
+            <a:endParaRPr/>
           </a:p>
         </p:txBody>
       </p:sp>
@@ -9430,6 +9539,7 @@
                 <a:latin typeface="Calibri"/>
               </a:defRPr>
             </a:pPr>
+            <a:endParaRPr/>
           </a:p>
           <a:p>
             <a:pPr algn="l">
@@ -9603,6 +9713,7 @@
           <a:lstStyle/>
           <a:p>
             <a:pPr algn="ctr"/>
+            <a:endParaRPr/>
           </a:p>
         </p:txBody>
       </p:sp>
@@ -9655,6 +9766,7 @@
                 <a:latin typeface="Calibri"/>
               </a:defRPr>
             </a:pPr>
+            <a:endParaRPr/>
           </a:p>
           <a:p>
             <a:pPr algn="l">
@@ -9731,7 +9843,7 @@
 </file>
 
 <file path=ppt/slides/slide15.xml><?xml version="1.0" encoding="utf-8"?>
-<p:sld xmlns:a="http://schemas.openxmlformats.org/drawingml/2006/main" xmlns:p="http://schemas.openxmlformats.org/presentationml/2006/main" xmlns:r="http://schemas.openxmlformats.org/officeDocument/2006/relationships">
+<p:sld xmlns:a="http://schemas.openxmlformats.org/drawingml/2006/main" xmlns:r="http://schemas.openxmlformats.org/officeDocument/2006/relationships" xmlns:p="http://schemas.openxmlformats.org/presentationml/2006/main">
   <p:cSld>
     <p:spTree>
       <p:nvGrpSpPr>
@@ -9739,7 +9851,14 @@
         <p:cNvGrpSpPr/>
         <p:nvPr/>
       </p:nvGrpSpPr>
-      <p:grpSpPr/>
+      <p:grpSpPr>
+        <a:xfrm>
+          <a:off x="0" y="0"/>
+          <a:ext cx="0" cy="0"/>
+          <a:chOff x="0" y="0"/>
+          <a:chExt cx="0" cy="0"/>
+        </a:xfrm>
+      </p:grpSpPr>
       <p:sp>
         <p:nvSpPr>
           <p:cNvPr id="2" name="Rectangle 1"/>
@@ -9782,6 +9901,7 @@
           <a:lstStyle/>
           <a:p>
             <a:pPr algn="ctr"/>
+            <a:endParaRPr/>
           </a:p>
         </p:txBody>
       </p:sp>
@@ -9827,6 +9947,7 @@
           <a:lstStyle/>
           <a:p>
             <a:pPr algn="ctr"/>
+            <a:endParaRPr/>
           </a:p>
         </p:txBody>
       </p:sp>
@@ -9908,6 +10029,7 @@
           <a:lstStyle/>
           <a:p>
             <a:pPr algn="ctr"/>
+            <a:endParaRPr/>
           </a:p>
         </p:txBody>
       </p:sp>
@@ -10012,6 +10134,7 @@
                 <a:latin typeface="Calibri"/>
               </a:defRPr>
             </a:pPr>
+            <a:endParaRPr/>
           </a:p>
           <a:p>
             <a:pPr algn="ctr">
@@ -10072,7 +10195,7 @@
 </file>
 
 <file path=ppt/slides/slide2.xml><?xml version="1.0" encoding="utf-8"?>
-<p:sld xmlns:a="http://schemas.openxmlformats.org/drawingml/2006/main" xmlns:p="http://schemas.openxmlformats.org/presentationml/2006/main" xmlns:r="http://schemas.openxmlformats.org/officeDocument/2006/relationships">
+<p:sld xmlns:a="http://schemas.openxmlformats.org/drawingml/2006/main" xmlns:r="http://schemas.openxmlformats.org/officeDocument/2006/relationships" xmlns:p="http://schemas.openxmlformats.org/presentationml/2006/main">
   <p:cSld>
     <p:spTree>
       <p:nvGrpSpPr>
@@ -10080,7 +10203,14 @@
         <p:cNvGrpSpPr/>
         <p:nvPr/>
       </p:nvGrpSpPr>
-      <p:grpSpPr/>
+      <p:grpSpPr>
+        <a:xfrm>
+          <a:off x="0" y="0"/>
+          <a:ext cx="0" cy="0"/>
+          <a:chOff x="0" y="0"/>
+          <a:chExt cx="0" cy="0"/>
+        </a:xfrm>
+      </p:grpSpPr>
       <p:sp>
         <p:nvSpPr>
           <p:cNvPr id="2" name="Rectangle 1"/>
@@ -10123,6 +10253,7 @@
           <a:lstStyle/>
           <a:p>
             <a:pPr algn="ctr"/>
+            <a:endParaRPr/>
           </a:p>
         </p:txBody>
       </p:sp>
@@ -10168,6 +10299,7 @@
           <a:lstStyle/>
           <a:p>
             <a:pPr algn="ctr"/>
+            <a:endParaRPr/>
           </a:p>
         </p:txBody>
       </p:sp>
@@ -10249,6 +10381,7 @@
           <a:lstStyle/>
           <a:p>
             <a:pPr algn="ctr"/>
+            <a:endParaRPr/>
           </a:p>
         </p:txBody>
       </p:sp>
@@ -10294,6 +10427,7 @@
           <a:lstStyle/>
           <a:p>
             <a:pPr algn="ctr"/>
+            <a:endParaRPr/>
           </a:p>
         </p:txBody>
       </p:sp>
@@ -10306,7 +10440,7 @@
         <p:spPr>
           <a:xfrm>
             <a:off x="1005840" y="1280160"/>
-            <a:ext cx="4572000" cy="2286000"/>
+            <a:ext cx="4572000" cy="1800493"/>
           </a:xfrm>
           <a:prstGeom prst="rect">
             <a:avLst/>
@@ -10331,6 +10465,7 @@
               </a:defRPr>
             </a:pPr>
             <a:r>
+              <a:rPr dirty="0"/>
               <a:t>The Problem</a:t>
             </a:r>
           </a:p>
@@ -10346,6 +10481,7 @@
                 <a:latin typeface="Calibri"/>
               </a:defRPr>
             </a:pPr>
+            <a:endParaRPr dirty="0"/>
           </a:p>
           <a:p>
             <a:pPr algn="l">
@@ -10360,14 +10496,41 @@
               </a:defRPr>
             </a:pPr>
             <a:r>
-              <a:t>  ICL works -- but we don't fully understand WHY</a:t>
-            </a:r>
-          </a:p>
-          <a:p>
-            <a:pPr algn="l">
-              <a:spcAft>
-                <a:spcPts val="300"/>
-              </a:spcAft>
+              <a:rPr dirty="0"/>
+              <a:t>  ICL works </a:t>
+            </a:r>
+            <a:r>
+              <a:rPr lang="en-US" dirty="0"/>
+              <a:t>–</a:t>
+            </a:r>
+            <a:r>
+              <a:rPr dirty="0"/>
+              <a:t> but</a:t>
+            </a:r>
+            <a:r>
+              <a:rPr lang="en-US" dirty="0"/>
+              <a:t> f</a:t>
+            </a:r>
+            <a:r>
+              <a:rPr dirty="0"/>
+              <a:t>ragile: sensitive to demo order, selection, </a:t>
+            </a:r>
+            <a:r>
+              <a:rPr lang="en-US" dirty="0"/>
+              <a:t>            </a:t>
+            </a:r>
+            <a:r>
+              <a:rPr dirty="0"/>
+              <a:t>formatting</a:t>
+            </a:r>
+          </a:p>
+          <a:p>
+            <a:pPr marL="285750" indent="-285750" algn="l">
+              <a:spcAft>
+                <a:spcPts val="300"/>
+              </a:spcAft>
+              <a:buFont typeface="Arial" panose="020B0604020202020204" pitchFamily="34" charset="0"/>
+              <a:buChar char="•"/>
               <a:defRPr sz="1400" b="0">
                 <a:solidFill>
                   <a:srgbClr val="A0AEC0"/>
@@ -10376,14 +10539,17 @@
               </a:defRPr>
             </a:pPr>
             <a:r>
-              <a:t>  Fragile: sensitive to demo order, selection, formatting</a:t>
-            </a:r>
-          </a:p>
-          <a:p>
-            <a:pPr algn="l">
-              <a:spcAft>
-                <a:spcPts val="300"/>
-              </a:spcAft>
+              <a:rPr dirty="0"/>
+              <a:t>  Lacks negative feedback mechanism</a:t>
+            </a:r>
+          </a:p>
+          <a:p>
+            <a:pPr marL="285750" indent="-285750" algn="l">
+              <a:spcAft>
+                <a:spcPts val="300"/>
+              </a:spcAft>
+              <a:buFont typeface="Arial" panose="020B0604020202020204" pitchFamily="34" charset="0"/>
+              <a:buChar char="•"/>
               <a:defRPr sz="1400" b="0">
                 <a:solidFill>
                   <a:srgbClr val="A0AEC0"/>
@@ -10392,14 +10558,17 @@
               </a:defRPr>
             </a:pPr>
             <a:r>
-              <a:t>  Lacks negative feedback mechanism</a:t>
-            </a:r>
-          </a:p>
-          <a:p>
-            <a:pPr algn="l">
-              <a:spcAft>
-                <a:spcPts val="300"/>
-              </a:spcAft>
+              <a:rPr dirty="0"/>
+              <a:t>  No explicit feature selection / axis weighting</a:t>
+            </a:r>
+          </a:p>
+          <a:p>
+            <a:pPr marL="285750" indent="-285750" algn="l">
+              <a:spcAft>
+                <a:spcPts val="300"/>
+              </a:spcAft>
+              <a:buFont typeface="Arial" panose="020B0604020202020204" pitchFamily="34" charset="0"/>
+              <a:buChar char="•"/>
               <a:defRPr sz="1400" b="0">
                 <a:solidFill>
                   <a:srgbClr val="A0AEC0"/>
@@ -10408,22 +10577,7 @@
               </a:defRPr>
             </a:pPr>
             <a:r>
-              <a:t>  No explicit feature selection / axis weighting</a:t>
-            </a:r>
-          </a:p>
-          <a:p>
-            <a:pPr algn="l">
-              <a:spcAft>
-                <a:spcPts val="300"/>
-              </a:spcAft>
-              <a:defRPr sz="1400" b="0">
-                <a:solidFill>
-                  <a:srgbClr val="A0AEC0"/>
-                </a:solidFill>
-                <a:latin typeface="Calibri"/>
-              </a:defRPr>
-            </a:pPr>
-            <a:r>
+              <a:rPr dirty="0"/>
               <a:t>  Theory-practice gap in latent space dynamics</a:t>
             </a:r>
           </a:p>
@@ -10471,6 +10625,7 @@
           <a:lstStyle/>
           <a:p>
             <a:pPr algn="ctr"/>
+            <a:endParaRPr/>
           </a:p>
         </p:txBody>
       </p:sp>
@@ -10523,6 +10678,7 @@
                 <a:latin typeface="Calibri"/>
               </a:defRPr>
             </a:pPr>
+            <a:endParaRPr/>
           </a:p>
           <a:p>
             <a:pPr algn="l">
@@ -10648,6 +10804,7 @@
           <a:lstStyle/>
           <a:p>
             <a:pPr algn="ctr"/>
+            <a:endParaRPr/>
           </a:p>
         </p:txBody>
       </p:sp>
@@ -10700,6 +10857,7 @@
                 <a:latin typeface="Calibri"/>
               </a:defRPr>
             </a:pPr>
+            <a:endParaRPr/>
           </a:p>
           <a:p>
             <a:pPr algn="l">
@@ -10776,7 +10934,7 @@
 </file>
 
 <file path=ppt/slides/slide3.xml><?xml version="1.0" encoding="utf-8"?>
-<p:sld xmlns:a="http://schemas.openxmlformats.org/drawingml/2006/main" xmlns:p="http://schemas.openxmlformats.org/presentationml/2006/main" xmlns:r="http://schemas.openxmlformats.org/officeDocument/2006/relationships">
+<p:sld xmlns:a="http://schemas.openxmlformats.org/drawingml/2006/main" xmlns:r="http://schemas.openxmlformats.org/officeDocument/2006/relationships" xmlns:p="http://schemas.openxmlformats.org/presentationml/2006/main">
   <p:cSld>
     <p:spTree>
       <p:nvGrpSpPr>
@@ -10784,7 +10942,14 @@
         <p:cNvGrpSpPr/>
         <p:nvPr/>
       </p:nvGrpSpPr>
-      <p:grpSpPr/>
+      <p:grpSpPr>
+        <a:xfrm>
+          <a:off x="0" y="0"/>
+          <a:ext cx="0" cy="0"/>
+          <a:chOff x="0" y="0"/>
+          <a:chExt cx="0" cy="0"/>
+        </a:xfrm>
+      </p:grpSpPr>
       <p:sp>
         <p:nvSpPr>
           <p:cNvPr id="2" name="Rectangle 1"/>
@@ -10827,6 +10992,7 @@
           <a:lstStyle/>
           <a:p>
             <a:pPr algn="ctr"/>
+            <a:endParaRPr/>
           </a:p>
         </p:txBody>
       </p:sp>
@@ -10872,6 +11038,7 @@
           <a:lstStyle/>
           <a:p>
             <a:pPr algn="ctr"/>
+            <a:endParaRPr/>
           </a:p>
         </p:txBody>
       </p:sp>
@@ -10953,6 +11120,7 @@
           <a:lstStyle/>
           <a:p>
             <a:pPr algn="ctr"/>
+            <a:endParaRPr/>
           </a:p>
         </p:txBody>
       </p:sp>
@@ -10998,6 +11166,7 @@
           <a:lstStyle/>
           <a:p>
             <a:pPr algn="ctr"/>
+            <a:endParaRPr/>
           </a:p>
         </p:txBody>
       </p:sp>
@@ -11050,6 +11219,7 @@
                 <a:latin typeface="Calibri"/>
               </a:defRPr>
             </a:pPr>
+            <a:endParaRPr/>
           </a:p>
           <a:p>
             <a:pPr algn="l">
@@ -11143,6 +11313,7 @@
           <a:lstStyle/>
           <a:p>
             <a:pPr algn="ctr"/>
+            <a:endParaRPr/>
           </a:p>
         </p:txBody>
       </p:sp>
@@ -11195,6 +11366,7 @@
                 <a:latin typeface="Calibri"/>
               </a:defRPr>
             </a:pPr>
+            <a:endParaRPr/>
           </a:p>
           <a:p>
             <a:pPr algn="l">
@@ -11336,6 +11508,7 @@
           <a:lstStyle/>
           <a:p>
             <a:pPr algn="ctr"/>
+            <a:endParaRPr/>
           </a:p>
         </p:txBody>
       </p:sp>
@@ -11388,6 +11561,7 @@
                 <a:latin typeface="Calibri"/>
               </a:defRPr>
             </a:pPr>
+            <a:endParaRPr/>
           </a:p>
           <a:p>
             <a:pPr algn="l">
@@ -11496,7 +11670,7 @@
 </file>
 
 <file path=ppt/slides/slide4.xml><?xml version="1.0" encoding="utf-8"?>
-<p:sld xmlns:a="http://schemas.openxmlformats.org/drawingml/2006/main" xmlns:p="http://schemas.openxmlformats.org/presentationml/2006/main" xmlns:r="http://schemas.openxmlformats.org/officeDocument/2006/relationships">
+<p:sld xmlns:a="http://schemas.openxmlformats.org/drawingml/2006/main" xmlns:r="http://schemas.openxmlformats.org/officeDocument/2006/relationships" xmlns:p="http://schemas.openxmlformats.org/presentationml/2006/main">
   <p:cSld>
     <p:spTree>
       <p:nvGrpSpPr>
@@ -11504,7 +11678,14 @@
         <p:cNvGrpSpPr/>
         <p:nvPr/>
       </p:nvGrpSpPr>
-      <p:grpSpPr/>
+      <p:grpSpPr>
+        <a:xfrm>
+          <a:off x="0" y="0"/>
+          <a:ext cx="0" cy="0"/>
+          <a:chOff x="0" y="0"/>
+          <a:chExt cx="0" cy="0"/>
+        </a:xfrm>
+      </p:grpSpPr>
       <p:sp>
         <p:nvSpPr>
           <p:cNvPr id="2" name="Rectangle 1"/>
@@ -11547,6 +11728,7 @@
           <a:lstStyle/>
           <a:p>
             <a:pPr algn="ctr"/>
+            <a:endParaRPr/>
           </a:p>
         </p:txBody>
       </p:sp>
@@ -11592,6 +11774,7 @@
           <a:lstStyle/>
           <a:p>
             <a:pPr algn="ctr"/>
+            <a:endParaRPr/>
           </a:p>
         </p:txBody>
       </p:sp>
@@ -11673,6 +11856,7 @@
           <a:lstStyle/>
           <a:p>
             <a:pPr algn="ctr"/>
+            <a:endParaRPr/>
           </a:p>
         </p:txBody>
       </p:sp>
@@ -11718,6 +11902,7 @@
           <a:lstStyle/>
           <a:p>
             <a:pPr algn="ctr"/>
+            <a:endParaRPr/>
           </a:p>
         </p:txBody>
       </p:sp>
@@ -11786,6 +11971,7 @@
                 <a:latin typeface="Calibri"/>
               </a:defRPr>
             </a:pPr>
+            <a:endParaRPr/>
           </a:p>
           <a:p>
             <a:pPr algn="l">
@@ -11863,6 +12049,7 @@
                 <a:latin typeface="Calibri"/>
               </a:defRPr>
             </a:pPr>
+            <a:endParaRPr/>
           </a:p>
           <a:p>
             <a:pPr algn="l">
@@ -11924,6 +12111,7 @@
                 <a:latin typeface="Calibri"/>
               </a:defRPr>
             </a:pPr>
+            <a:endParaRPr/>
           </a:p>
           <a:p>
             <a:pPr algn="l">
@@ -12017,6 +12205,7 @@
           <a:lstStyle/>
           <a:p>
             <a:pPr algn="ctr"/>
+            <a:endParaRPr/>
           </a:p>
         </p:txBody>
       </p:sp>
@@ -12085,6 +12274,7 @@
                 <a:latin typeface="Calibri"/>
               </a:defRPr>
             </a:pPr>
+            <a:endParaRPr/>
           </a:p>
           <a:p>
             <a:pPr algn="l">
@@ -12162,6 +12352,7 @@
                 <a:latin typeface="Calibri"/>
               </a:defRPr>
             </a:pPr>
+            <a:endParaRPr/>
           </a:p>
           <a:p>
             <a:pPr algn="l">
@@ -12223,6 +12414,7 @@
                 <a:latin typeface="Calibri"/>
               </a:defRPr>
             </a:pPr>
+            <a:endParaRPr/>
           </a:p>
           <a:p>
             <a:pPr algn="l">
@@ -12300,6 +12492,7 @@
           <a:lstStyle/>
           <a:p>
             <a:pPr algn="ctr"/>
+            <a:endParaRPr/>
           </a:p>
         </p:txBody>
       </p:sp>
@@ -12368,6 +12561,7 @@
                 <a:latin typeface="Calibri"/>
               </a:defRPr>
             </a:pPr>
+            <a:endParaRPr/>
           </a:p>
           <a:p>
             <a:pPr algn="l">
@@ -12413,6 +12607,7 @@
                 <a:latin typeface="Calibri"/>
               </a:defRPr>
             </a:pPr>
+            <a:endParaRPr/>
           </a:p>
           <a:p>
             <a:pPr algn="l">
@@ -12490,6 +12685,7 @@
                 <a:latin typeface="Calibri"/>
               </a:defRPr>
             </a:pPr>
+            <a:endParaRPr/>
           </a:p>
           <a:p>
             <a:pPr algn="l">
@@ -12534,7 +12730,7 @@
 </file>
 
 <file path=ppt/slides/slide5.xml><?xml version="1.0" encoding="utf-8"?>
-<p:sld xmlns:a="http://schemas.openxmlformats.org/drawingml/2006/main" xmlns:p="http://schemas.openxmlformats.org/presentationml/2006/main" xmlns:r="http://schemas.openxmlformats.org/officeDocument/2006/relationships">
+<p:sld xmlns:a="http://schemas.openxmlformats.org/drawingml/2006/main" xmlns:r="http://schemas.openxmlformats.org/officeDocument/2006/relationships" xmlns:p="http://schemas.openxmlformats.org/presentationml/2006/main">
   <p:cSld>
     <p:spTree>
       <p:nvGrpSpPr>
@@ -12542,7 +12738,14 @@
         <p:cNvGrpSpPr/>
         <p:nvPr/>
       </p:nvGrpSpPr>
-      <p:grpSpPr/>
+      <p:grpSpPr>
+        <a:xfrm>
+          <a:off x="0" y="0"/>
+          <a:ext cx="0" cy="0"/>
+          <a:chOff x="0" y="0"/>
+          <a:chExt cx="0" cy="0"/>
+        </a:xfrm>
+      </p:grpSpPr>
       <p:sp>
         <p:nvSpPr>
           <p:cNvPr id="2" name="Rectangle 1"/>
@@ -12585,6 +12788,7 @@
           <a:lstStyle/>
           <a:p>
             <a:pPr algn="ctr"/>
+            <a:endParaRPr/>
           </a:p>
         </p:txBody>
       </p:sp>
@@ -12630,6 +12834,7 @@
           <a:lstStyle/>
           <a:p>
             <a:pPr algn="ctr"/>
+            <a:endParaRPr/>
           </a:p>
         </p:txBody>
       </p:sp>
@@ -12711,6 +12916,7 @@
           <a:lstStyle/>
           <a:p>
             <a:pPr algn="ctr"/>
+            <a:endParaRPr/>
           </a:p>
         </p:txBody>
       </p:sp>
@@ -12756,6 +12962,7 @@
           <a:lstStyle/>
           <a:p>
             <a:pPr algn="ctr"/>
+            <a:endParaRPr/>
           </a:p>
         </p:txBody>
       </p:sp>
@@ -12808,6 +13015,7 @@
                 <a:latin typeface="Calibri"/>
               </a:defRPr>
             </a:pPr>
+            <a:endParaRPr/>
           </a:p>
           <a:p>
             <a:pPr algn="l">
@@ -12837,6 +13045,7 @@
                 <a:latin typeface="Calibri"/>
               </a:defRPr>
             </a:pPr>
+            <a:endParaRPr/>
           </a:p>
           <a:p>
             <a:pPr algn="l">
@@ -12882,6 +13091,7 @@
                 <a:latin typeface="Calibri"/>
               </a:defRPr>
             </a:pPr>
+            <a:endParaRPr/>
           </a:p>
           <a:p>
             <a:pPr algn="l">
@@ -12959,6 +13169,7 @@
           <a:lstStyle/>
           <a:p>
             <a:pPr algn="ctr"/>
+            <a:endParaRPr/>
           </a:p>
         </p:txBody>
       </p:sp>
@@ -13011,6 +13222,7 @@
                 <a:latin typeface="Calibri"/>
               </a:defRPr>
             </a:pPr>
+            <a:endParaRPr/>
           </a:p>
           <a:p>
             <a:pPr algn="l">
@@ -13056,6 +13268,7 @@
                 <a:latin typeface="Calibri"/>
               </a:defRPr>
             </a:pPr>
+            <a:endParaRPr/>
           </a:p>
           <a:p>
             <a:pPr algn="l">
@@ -13101,6 +13314,7 @@
                 <a:latin typeface="Calibri"/>
               </a:defRPr>
             </a:pPr>
+            <a:endParaRPr/>
           </a:p>
           <a:p>
             <a:pPr algn="l">
@@ -13178,6 +13392,7 @@
           <a:lstStyle/>
           <a:p>
             <a:pPr algn="ctr"/>
+            <a:endParaRPr/>
           </a:p>
         </p:txBody>
       </p:sp>
@@ -13230,6 +13445,7 @@
                 <a:latin typeface="Calibri"/>
               </a:defRPr>
             </a:pPr>
+            <a:endParaRPr/>
           </a:p>
           <a:p>
             <a:pPr algn="l">
@@ -13259,6 +13475,7 @@
                 <a:latin typeface="Calibri"/>
               </a:defRPr>
             </a:pPr>
+            <a:endParaRPr/>
           </a:p>
           <a:p>
             <a:pPr algn="l">
@@ -13304,6 +13521,7 @@
                 <a:latin typeface="Calibri"/>
               </a:defRPr>
             </a:pPr>
+            <a:endParaRPr/>
           </a:p>
           <a:p>
             <a:pPr algn="l">
@@ -13332,7 +13550,7 @@
 </file>
 
 <file path=ppt/slides/slide6.xml><?xml version="1.0" encoding="utf-8"?>
-<p:sld xmlns:a="http://schemas.openxmlformats.org/drawingml/2006/main" xmlns:p="http://schemas.openxmlformats.org/presentationml/2006/main" xmlns:r="http://schemas.openxmlformats.org/officeDocument/2006/relationships">
+<p:sld xmlns:a="http://schemas.openxmlformats.org/drawingml/2006/main" xmlns:r="http://schemas.openxmlformats.org/officeDocument/2006/relationships" xmlns:p="http://schemas.openxmlformats.org/presentationml/2006/main">
   <p:cSld>
     <p:spTree>
       <p:nvGrpSpPr>
@@ -13340,7 +13558,14 @@
         <p:cNvGrpSpPr/>
         <p:nvPr/>
       </p:nvGrpSpPr>
-      <p:grpSpPr/>
+      <p:grpSpPr>
+        <a:xfrm>
+          <a:off x="0" y="0"/>
+          <a:ext cx="0" cy="0"/>
+          <a:chOff x="0" y="0"/>
+          <a:chExt cx="0" cy="0"/>
+        </a:xfrm>
+      </p:grpSpPr>
       <p:sp>
         <p:nvSpPr>
           <p:cNvPr id="2" name="Rectangle 1"/>
@@ -13383,6 +13608,7 @@
           <a:lstStyle/>
           <a:p>
             <a:pPr algn="ctr"/>
+            <a:endParaRPr/>
           </a:p>
         </p:txBody>
       </p:sp>
@@ -13428,6 +13654,7 @@
           <a:lstStyle/>
           <a:p>
             <a:pPr algn="ctr"/>
+            <a:endParaRPr/>
           </a:p>
         </p:txBody>
       </p:sp>
@@ -13509,6 +13736,7 @@
           <a:lstStyle/>
           <a:p>
             <a:pPr algn="ctr"/>
+            <a:endParaRPr/>
           </a:p>
         </p:txBody>
       </p:sp>
@@ -13554,6 +13782,7 @@
           <a:lstStyle/>
           <a:p>
             <a:pPr algn="ctr"/>
+            <a:endParaRPr/>
           </a:p>
         </p:txBody>
       </p:sp>
@@ -13715,6 +13944,7 @@
           <a:lstStyle/>
           <a:p>
             <a:pPr algn="ctr"/>
+            <a:endParaRPr/>
           </a:p>
         </p:txBody>
       </p:sp>
@@ -13876,6 +14106,7 @@
           <a:lstStyle/>
           <a:p>
             <a:pPr algn="ctr"/>
+            <a:endParaRPr/>
           </a:p>
         </p:txBody>
       </p:sp>
@@ -14037,6 +14268,7 @@
           <a:lstStyle/>
           <a:p>
             <a:pPr algn="ctr"/>
+            <a:endParaRPr/>
           </a:p>
         </p:txBody>
       </p:sp>
@@ -14165,7 +14397,7 @@
 </file>
 
 <file path=ppt/slides/slide7.xml><?xml version="1.0" encoding="utf-8"?>
-<p:sld xmlns:a="http://schemas.openxmlformats.org/drawingml/2006/main" xmlns:p="http://schemas.openxmlformats.org/presentationml/2006/main" xmlns:r="http://schemas.openxmlformats.org/officeDocument/2006/relationships">
+<p:sld xmlns:a="http://schemas.openxmlformats.org/drawingml/2006/main" xmlns:r="http://schemas.openxmlformats.org/officeDocument/2006/relationships" xmlns:p="http://schemas.openxmlformats.org/presentationml/2006/main">
   <p:cSld>
     <p:spTree>
       <p:nvGrpSpPr>
@@ -14173,7 +14405,14 @@
         <p:cNvGrpSpPr/>
         <p:nvPr/>
       </p:nvGrpSpPr>
-      <p:grpSpPr/>
+      <p:grpSpPr>
+        <a:xfrm>
+          <a:off x="0" y="0"/>
+          <a:ext cx="0" cy="0"/>
+          <a:chOff x="0" y="0"/>
+          <a:chExt cx="0" cy="0"/>
+        </a:xfrm>
+      </p:grpSpPr>
       <p:sp>
         <p:nvSpPr>
           <p:cNvPr id="2" name="Rectangle 1"/>
@@ -14216,6 +14455,7 @@
           <a:lstStyle/>
           <a:p>
             <a:pPr algn="ctr"/>
+            <a:endParaRPr/>
           </a:p>
         </p:txBody>
       </p:sp>
@@ -14261,6 +14501,7 @@
           <a:lstStyle/>
           <a:p>
             <a:pPr algn="ctr"/>
+            <a:endParaRPr/>
           </a:p>
         </p:txBody>
       </p:sp>
@@ -14342,6 +14583,7 @@
           <a:lstStyle/>
           <a:p>
             <a:pPr algn="ctr"/>
+            <a:endParaRPr/>
           </a:p>
         </p:txBody>
       </p:sp>
@@ -14423,6 +14665,7 @@
           <a:lstStyle/>
           <a:p>
             <a:pPr algn="ctr"/>
+            <a:endParaRPr/>
           </a:p>
         </p:txBody>
       </p:sp>
@@ -14468,6 +14711,7 @@
           <a:lstStyle/>
           <a:p>
             <a:pPr algn="ctr"/>
+            <a:endParaRPr/>
           </a:p>
         </p:txBody>
       </p:sp>
@@ -14633,6 +14877,7 @@
           <a:lstStyle/>
           <a:p>
             <a:pPr algn="ctr"/>
+            <a:endParaRPr/>
           </a:p>
         </p:txBody>
       </p:sp>
@@ -14714,6 +14959,7 @@
           <a:lstStyle/>
           <a:p>
             <a:pPr algn="ctr"/>
+            <a:endParaRPr/>
           </a:p>
         </p:txBody>
       </p:sp>
@@ -14759,6 +15005,7 @@
           <a:lstStyle/>
           <a:p>
             <a:pPr algn="ctr"/>
+            <a:endParaRPr/>
           </a:p>
         </p:txBody>
       </p:sp>
@@ -14924,6 +15171,7 @@
           <a:lstStyle/>
           <a:p>
             <a:pPr algn="ctr"/>
+            <a:endParaRPr/>
           </a:p>
         </p:txBody>
       </p:sp>
@@ -15005,6 +15253,7 @@
           <a:lstStyle/>
           <a:p>
             <a:pPr algn="ctr"/>
+            <a:endParaRPr/>
           </a:p>
         </p:txBody>
       </p:sp>
@@ -15050,6 +15299,7 @@
           <a:lstStyle/>
           <a:p>
             <a:pPr algn="ctr"/>
+            <a:endParaRPr/>
           </a:p>
         </p:txBody>
       </p:sp>
@@ -15215,6 +15465,7 @@
           <a:lstStyle/>
           <a:p>
             <a:pPr algn="ctr"/>
+            <a:endParaRPr/>
           </a:p>
         </p:txBody>
       </p:sp>
@@ -15296,6 +15547,7 @@
           <a:lstStyle/>
           <a:p>
             <a:pPr algn="ctr"/>
+            <a:endParaRPr/>
           </a:p>
         </p:txBody>
       </p:sp>
@@ -15341,6 +15593,7 @@
           <a:lstStyle/>
           <a:p>
             <a:pPr algn="ctr"/>
+            <a:endParaRPr/>
           </a:p>
         </p:txBody>
       </p:sp>
@@ -15506,6 +15759,7 @@
           <a:lstStyle/>
           <a:p>
             <a:pPr algn="ctr"/>
+            <a:endParaRPr/>
           </a:p>
         </p:txBody>
       </p:sp>
@@ -15587,6 +15841,7 @@
           <a:lstStyle/>
           <a:p>
             <a:pPr algn="ctr"/>
+            <a:endParaRPr/>
           </a:p>
         </p:txBody>
       </p:sp>
@@ -15632,6 +15887,7 @@
           <a:lstStyle/>
           <a:p>
             <a:pPr algn="ctr"/>
+            <a:endParaRPr/>
           </a:p>
         </p:txBody>
       </p:sp>
@@ -15797,6 +16053,7 @@
           <a:lstStyle/>
           <a:p>
             <a:pPr algn="ctr"/>
+            <a:endParaRPr/>
           </a:p>
         </p:txBody>
       </p:sp>
@@ -15878,6 +16135,7 @@
           <a:lstStyle/>
           <a:p>
             <a:pPr algn="ctr"/>
+            <a:endParaRPr/>
           </a:p>
         </p:txBody>
       </p:sp>
@@ -15923,6 +16181,7 @@
           <a:lstStyle/>
           <a:p>
             <a:pPr algn="ctr"/>
+            <a:endParaRPr/>
           </a:p>
         </p:txBody>
       </p:sp>
@@ -16088,6 +16347,7 @@
           <a:lstStyle/>
           <a:p>
             <a:pPr algn="ctr"/>
+            <a:endParaRPr/>
           </a:p>
         </p:txBody>
       </p:sp>
@@ -16176,6 +16436,7 @@
                 <a:latin typeface="Calibri"/>
               </a:defRPr>
             </a:pPr>
+            <a:endParaRPr/>
           </a:p>
           <a:p>
             <a:pPr algn="l">
@@ -16204,7 +16465,7 @@
 </file>
 
 <file path=ppt/slides/slide8.xml><?xml version="1.0" encoding="utf-8"?>
-<p:sld xmlns:a="http://schemas.openxmlformats.org/drawingml/2006/main" xmlns:p="http://schemas.openxmlformats.org/presentationml/2006/main" xmlns:r="http://schemas.openxmlformats.org/officeDocument/2006/relationships">
+<p:sld xmlns:a="http://schemas.openxmlformats.org/drawingml/2006/main" xmlns:r="http://schemas.openxmlformats.org/officeDocument/2006/relationships" xmlns:p="http://schemas.openxmlformats.org/presentationml/2006/main">
   <p:cSld>
     <p:spTree>
       <p:nvGrpSpPr>
@@ -16212,7 +16473,14 @@
         <p:cNvGrpSpPr/>
         <p:nvPr/>
       </p:nvGrpSpPr>
-      <p:grpSpPr/>
+      <p:grpSpPr>
+        <a:xfrm>
+          <a:off x="0" y="0"/>
+          <a:ext cx="0" cy="0"/>
+          <a:chOff x="0" y="0"/>
+          <a:chExt cx="0" cy="0"/>
+        </a:xfrm>
+      </p:grpSpPr>
       <p:sp>
         <p:nvSpPr>
           <p:cNvPr id="2" name="Rectangle 1"/>
@@ -16255,6 +16523,7 @@
           <a:lstStyle/>
           <a:p>
             <a:pPr algn="ctr"/>
+            <a:endParaRPr/>
           </a:p>
         </p:txBody>
       </p:sp>
@@ -16300,6 +16569,7 @@
           <a:lstStyle/>
           <a:p>
             <a:pPr algn="ctr"/>
+            <a:endParaRPr/>
           </a:p>
         </p:txBody>
       </p:sp>
@@ -16381,6 +16651,7 @@
           <a:lstStyle/>
           <a:p>
             <a:pPr algn="ctr"/>
+            <a:endParaRPr/>
           </a:p>
         </p:txBody>
       </p:sp>
@@ -16426,6 +16697,7 @@
           <a:lstStyle/>
           <a:p>
             <a:pPr algn="ctr"/>
+            <a:endParaRPr/>
           </a:p>
         </p:txBody>
       </p:sp>
@@ -16478,6 +16750,7 @@
                 <a:latin typeface="Calibri"/>
               </a:defRPr>
             </a:pPr>
+            <a:endParaRPr/>
           </a:p>
           <a:p>
             <a:pPr algn="l">
@@ -16539,6 +16812,7 @@
                 <a:latin typeface="Calibri"/>
               </a:defRPr>
             </a:pPr>
+            <a:endParaRPr/>
           </a:p>
           <a:p>
             <a:pPr algn="l">
@@ -16632,6 +16906,7 @@
           <a:lstStyle/>
           <a:p>
             <a:pPr algn="ctr"/>
+            <a:endParaRPr/>
           </a:p>
         </p:txBody>
       </p:sp>
@@ -16684,6 +16959,7 @@
                 <a:latin typeface="Calibri"/>
               </a:defRPr>
             </a:pPr>
+            <a:endParaRPr/>
           </a:p>
           <a:p>
             <a:pPr algn="l">
@@ -16745,6 +17021,7 @@
                 <a:latin typeface="Calibri"/>
               </a:defRPr>
             </a:pPr>
+            <a:endParaRPr/>
           </a:p>
           <a:p>
             <a:pPr algn="l">
@@ -16838,6 +17115,7 @@
           <a:lstStyle/>
           <a:p>
             <a:pPr algn="ctr"/>
+            <a:endParaRPr/>
           </a:p>
         </p:txBody>
       </p:sp>
@@ -16890,6 +17168,7 @@
                 <a:latin typeface="Calibri"/>
               </a:defRPr>
             </a:pPr>
+            <a:endParaRPr/>
           </a:p>
           <a:p>
             <a:pPr algn="l">
@@ -16951,6 +17230,7 @@
                 <a:latin typeface="Calibri"/>
               </a:defRPr>
             </a:pPr>
+            <a:endParaRPr/>
           </a:p>
           <a:p>
             <a:pPr algn="l">
@@ -17044,6 +17324,7 @@
           <a:lstStyle/>
           <a:p>
             <a:pPr algn="ctr"/>
+            <a:endParaRPr/>
           </a:p>
         </p:txBody>
       </p:sp>
@@ -17096,6 +17377,7 @@
                 <a:latin typeface="Calibri"/>
               </a:defRPr>
             </a:pPr>
+            <a:endParaRPr/>
           </a:p>
           <a:p>
             <a:pPr algn="l">
@@ -17157,6 +17439,7 @@
                 <a:latin typeface="Calibri"/>
               </a:defRPr>
             </a:pPr>
+            <a:endParaRPr/>
           </a:p>
           <a:p>
             <a:pPr algn="l">
@@ -17185,7 +17468,7 @@
 </file>
 
 <file path=ppt/slides/slide9.xml><?xml version="1.0" encoding="utf-8"?>
-<p:sld xmlns:a="http://schemas.openxmlformats.org/drawingml/2006/main" xmlns:p="http://schemas.openxmlformats.org/presentationml/2006/main" xmlns:r="http://schemas.openxmlformats.org/officeDocument/2006/relationships">
+<p:sld xmlns:a="http://schemas.openxmlformats.org/drawingml/2006/main" xmlns:r="http://schemas.openxmlformats.org/officeDocument/2006/relationships" xmlns:p="http://schemas.openxmlformats.org/presentationml/2006/main">
   <p:cSld>
     <p:spTree>
       <p:nvGrpSpPr>
@@ -17193,7 +17476,14 @@
         <p:cNvGrpSpPr/>
         <p:nvPr/>
       </p:nvGrpSpPr>
-      <p:grpSpPr/>
+      <p:grpSpPr>
+        <a:xfrm>
+          <a:off x="0" y="0"/>
+          <a:ext cx="0" cy="0"/>
+          <a:chOff x="0" y="0"/>
+          <a:chExt cx="0" cy="0"/>
+        </a:xfrm>
+      </p:grpSpPr>
       <p:sp>
         <p:nvSpPr>
           <p:cNvPr id="2" name="Rectangle 1"/>
@@ -17236,6 +17526,7 @@
           <a:lstStyle/>
           <a:p>
             <a:pPr algn="ctr"/>
+            <a:endParaRPr/>
           </a:p>
         </p:txBody>
       </p:sp>
@@ -17281,6 +17572,7 @@
           <a:lstStyle/>
           <a:p>
             <a:pPr algn="ctr"/>
+            <a:endParaRPr/>
           </a:p>
         </p:txBody>
       </p:sp>
@@ -17362,6 +17654,7 @@
           <a:lstStyle/>
           <a:p>
             <a:pPr algn="ctr"/>
+            <a:endParaRPr/>
           </a:p>
         </p:txBody>
       </p:sp>
@@ -17407,6 +17700,7 @@
           <a:lstStyle/>
           <a:p>
             <a:pPr algn="ctr"/>
+            <a:endParaRPr/>
           </a:p>
         </p:txBody>
       </p:sp>
@@ -17459,6 +17753,7 @@
                 <a:latin typeface="Calibri"/>
               </a:defRPr>
             </a:pPr>
+            <a:endParaRPr/>
           </a:p>
           <a:p>
             <a:pPr algn="l">
@@ -17536,6 +17831,7 @@
                 <a:latin typeface="Calibri"/>
               </a:defRPr>
             </a:pPr>
+            <a:endParaRPr/>
           </a:p>
           <a:p>
             <a:pPr algn="l">
@@ -17629,6 +17925,7 @@
           <a:lstStyle/>
           <a:p>
             <a:pPr algn="ctr"/>
+            <a:endParaRPr/>
           </a:p>
         </p:txBody>
       </p:sp>
@@ -17681,6 +17978,7 @@
                 <a:latin typeface="Calibri"/>
               </a:defRPr>
             </a:pPr>
+            <a:endParaRPr/>
           </a:p>
           <a:p>
             <a:pPr algn="l">
@@ -17742,6 +18040,7 @@
                 <a:latin typeface="Calibri"/>
               </a:defRPr>
             </a:pPr>
+            <a:endParaRPr/>
           </a:p>
           <a:p>
             <a:pPr algn="l">
@@ -17851,6 +18150,7 @@
           <a:lstStyle/>
           <a:p>
             <a:pPr algn="ctr"/>
+            <a:endParaRPr/>
           </a:p>
         </p:txBody>
       </p:sp>
@@ -17903,6 +18203,7 @@
                 <a:latin typeface="Calibri"/>
               </a:defRPr>
             </a:pPr>
+            <a:endParaRPr/>
           </a:p>
           <a:p>
             <a:pPr algn="l">
@@ -17948,6 +18249,7 @@
                 <a:latin typeface="Calibri"/>
               </a:defRPr>
             </a:pPr>
+            <a:endParaRPr/>
           </a:p>
           <a:p>
             <a:pPr algn="l">
@@ -17993,6 +18295,7 @@
                 <a:latin typeface="Calibri"/>
               </a:defRPr>
             </a:pPr>
+            <a:endParaRPr/>
           </a:p>
           <a:p>
             <a:pPr algn="l">
